--- a/presentation-output/王宇航_技术面试汇报_SRAF完善版.pptx
+++ b/presentation-output/王宇航_技术面试汇报_SRAF完善版.pptx
@@ -337,9 +337,7 @@
           <a:bodyPr/>
           <a:lstStyle/>
           <a:p>
-            <a:r>
-              <a:t>开场建议：各位面试官好，我叫王宇航，目前就读于广东工业大学控制工程专业。我的研究主要围绕反演光刻、曲线OPC和SRAF参数化优化展开。接下来我会重点介绍两段科研工作和一段腾讯量子实验室实习经历。</a:t>
-            </a:r>
+            <a:endParaRPr dirty="0"/>
           </a:p>
         </p:txBody>
       </p:sp>
@@ -423,9 +421,7 @@
               </a:spcAft>
               <a:buNone/>
             </a:pPr>
-            <a:r>
-              <a:t>这一页控制在40秒。重点说明研究方向和能力结构，不逐条复述简历。可以补充：我的特点是能够把物理模型、优化算法和工程实现串联起来，并且既能用Python快速验证，也能用C++完成性能导向的实现。</a:t>
-            </a:r>
+            <a:endParaRPr dirty="0"/>
           </a:p>
         </p:txBody>
       </p:sp>
@@ -500,9 +496,7 @@
           <a:bodyPr/>
           <a:lstStyle/>
           <a:p>
-            <a:r>
-              <a:t>这一页先建立主线：第一阶段解决像素级曲线掩模生成，第二阶段把高冗余结果转成可制造、可优化的参数化表达，第三阶段将参数化和自动化经验应用到量子器件仿真与预测。</a:t>
-            </a:r>
+            <a:endParaRPr dirty="0"/>
           </a:p>
         </p:txBody>
       </p:sp>
@@ -586,9 +580,7 @@
               </a:spcAft>
               <a:buNone/>
             </a:pPr>
-            <a:r>
-              <a:t>讲解顺序：问题背景、个人职责、算法链路、工程实现。可补充说明速度场符号如何决定轮廓向内或向外运动，以及WENO在保持界面稳定和处理尖锐边界方面的作用。图片来自本地项目运行结果。</a:t>
-            </a:r>
+            <a:endParaRPr dirty="0"/>
           </a:p>
         </p:txBody>
       </p:sp>
@@ -672,9 +664,7 @@
               </a:spcAft>
               <a:buNone/>
             </a:pPr>
-            <a:r>
-              <a:t>这一页是科研重点，建议讲两分钟。先说明像素版图的数据冗余和制造表达问题，再讲轮廓抽稀、控制点优化和SRAF轻量化表达。图中展示了骨架线控制点以及宽度优化前后的PVBand结果。没有在简历中写明的具体EPE下降比例不要临时补数字。</a:t>
-            </a:r>
+            <a:endParaRPr dirty="0"/>
           </a:p>
         </p:txBody>
       </p:sp>
@@ -750,23 +740,10 @@
           <a:lstStyle/>
           <a:p>
             <a:r>
-              <a:t>图像由当前C++ demo_sraf_geometry基于result/LSM_result/LSM_mask.txt生成。</a:t>
-            </a:r>
-          </a:p>
-          <a:p>
-            <a:r>
-              <a:t>Zhang-Suen细化：10个SRAF连通分量，818个骨架像素。</a:t>
-            </a:r>
-          </a:p>
-          <a:p>
-            <a:r>
-              <a:t>控制点间隔为10个骨架像素，共110个控制点。</a:t>
-            </a:r>
-          </a:p>
-          <a:p>
-            <a:r>
-              <a:t>曲线重建采用3.1 px半宽和4×4 MSAA。</a:t>
-            </a:r>
+              <a:rPr lang="en-US" altLang="zh-CN" dirty="0"/>
+              <a:t>】</a:t>
+            </a:r>
+            <a:endParaRPr dirty="0"/>
           </a:p>
         </p:txBody>
       </p:sp>
@@ -841,9 +818,7 @@
           <a:bodyPr/>
           <a:lstStyle/>
           <a:p>
-            <a:r>
-              <a:t>说明个人职责：参数化几何生成、批量仿真、数据整理与模型训练。六类器件包括低通和高通叉指电容、低通和高通螺旋电感、比特Z线及耦合器Z线。误差和周期缩短按简历口径展示，面试前建议再次确认测试集、误差定义和统计范围。涉及腾讯内部数据时只讲流程和方法，不展示未脱敏截图。</a:t>
-            </a:r>
+            <a:endParaRPr dirty="0"/>
           </a:p>
         </p:txBody>
       </p:sp>
@@ -918,9 +893,7 @@
           <a:bodyPr/>
           <a:lstStyle/>
           <a:p>
-            <a:r>
-              <a:t>结尾建议：我的研究经历主要集中在物理建模、数值优化和工程实现，也积累了仿真数据与模型训练经验。希望将这些能力应用到贵公司的算法研发工作中。以上是我的介绍，谢谢各位面试官。请根据具体岗位JD调整最后一句。</a:t>
-            </a:r>
+            <a:endParaRPr dirty="0"/>
           </a:p>
         </p:txBody>
       </p:sp>
@@ -5798,7 +5771,7 @@
               </a:defRPr>
             </a:pPr>
             <a:r>
-              <a:rPr sz="1500" b="0">
+              <a:rPr sz="1500" b="0" dirty="0" err="1">
                 <a:solidFill>
                   <a:srgbClr val="405266"/>
                 </a:solidFill>
@@ -5808,6 +5781,14 @@
               </a:rPr>
               <a:t>光刻成像模型</a:t>
             </a:r>
+            <a:endParaRPr sz="1500" b="0" dirty="0">
+              <a:solidFill>
+                <a:srgbClr val="405266"/>
+              </a:solidFill>
+              <a:latin typeface="PingFang SC"/>
+              <a:ea typeface="PingFang SC"/>
+              <a:cs typeface="PingFang SC"/>
+            </a:endParaRPr>
           </a:p>
           <a:p>
             <a:pPr algn="l">
@@ -5825,7 +5806,7 @@
               </a:defRPr>
             </a:pPr>
             <a:r>
-              <a:rPr sz="1500" b="0">
+              <a:rPr sz="1500" b="0" dirty="0" err="1">
                 <a:solidFill>
                   <a:srgbClr val="405266"/>
                 </a:solidFill>
@@ -5835,6 +5816,14 @@
               </a:rPr>
               <a:t>WENO重构空间导数</a:t>
             </a:r>
+            <a:endParaRPr sz="1500" b="0" dirty="0">
+              <a:solidFill>
+                <a:srgbClr val="405266"/>
+              </a:solidFill>
+              <a:latin typeface="PingFang SC"/>
+              <a:ea typeface="PingFang SC"/>
+              <a:cs typeface="PingFang SC"/>
+            </a:endParaRPr>
           </a:p>
           <a:p>
             <a:pPr algn="l">
@@ -5852,7 +5841,7 @@
               </a:defRPr>
             </a:pPr>
             <a:r>
-              <a:rPr sz="1500">
+              <a:rPr sz="1500" dirty="0" err="1">
                 <a:solidFill>
                   <a:srgbClr val="405266"/>
                 </a:solidFill>
@@ -5863,7 +5852,7 @@
               <a:t>PE</a:t>
             </a:r>
             <a:r>
-              <a:rPr sz="1500" b="0">
+              <a:rPr sz="1500" b="0" dirty="0" err="1">
                 <a:solidFill>
                   <a:srgbClr val="405266"/>
                 </a:solidFill>
@@ -5873,6 +5862,38 @@
               </a:rPr>
               <a:t>驱动轮廓演化</a:t>
             </a:r>
+            <a:endParaRPr lang="en-US" sz="1500" b="0" dirty="0">
+              <a:solidFill>
+                <a:srgbClr val="405266"/>
+              </a:solidFill>
+              <a:latin typeface="PingFang SC"/>
+              <a:ea typeface="PingFang SC"/>
+              <a:cs typeface="PingFang SC"/>
+            </a:endParaRPr>
+          </a:p>
+          <a:p>
+            <a:pPr algn="l">
+              <a:lnSpc>
+                <a:spcPct val="120000"/>
+              </a:lnSpc>
+              <a:buNone/>
+              <a:defRPr sz="1500" b="0">
+                <a:solidFill>
+                  <a:srgbClr val="405266"/>
+                </a:solidFill>
+                <a:latin typeface="PingFang SC"/>
+                <a:ea typeface="PingFang SC"/>
+                <a:cs typeface="PingFang SC"/>
+              </a:defRPr>
+            </a:pPr>
+            <a:endParaRPr sz="1500" b="0" dirty="0">
+              <a:solidFill>
+                <a:srgbClr val="405266"/>
+              </a:solidFill>
+              <a:latin typeface="PingFang SC"/>
+              <a:ea typeface="PingFang SC"/>
+              <a:cs typeface="PingFang SC"/>
+            </a:endParaRPr>
           </a:p>
         </p:txBody>
       </p:sp>
@@ -5963,7 +5984,7 @@
               </a:defRPr>
             </a:pPr>
             <a:r>
-              <a:rPr sz="1950" b="1">
+              <a:rPr sz="1950" b="1" dirty="0" err="1">
                 <a:solidFill>
                   <a:srgbClr val="102238"/>
                 </a:solidFill>
@@ -5971,7 +5992,18 @@
                 <a:ea typeface="PingFang SC"/>
                 <a:cs typeface="PingFang SC"/>
               </a:rPr>
-              <a:t>参数化曲线 OPC</a:t>
+              <a:t>参数化曲线</a:t>
+            </a:r>
+            <a:r>
+              <a:rPr sz="1950" b="1" dirty="0">
+                <a:solidFill>
+                  <a:srgbClr val="102238"/>
+                </a:solidFill>
+                <a:latin typeface="PingFang SC"/>
+                <a:ea typeface="PingFang SC"/>
+                <a:cs typeface="PingFang SC"/>
+              </a:rPr>
+              <a:t> OPC</a:t>
             </a:r>
           </a:p>
         </p:txBody>
@@ -6024,7 +6056,7 @@
               </a:defRPr>
             </a:pPr>
             <a:r>
-              <a:rPr sz="1500" b="0">
+              <a:rPr sz="1500" b="0" dirty="0" err="1">
                 <a:solidFill>
                   <a:srgbClr val="405266"/>
                 </a:solidFill>
@@ -6034,6 +6066,14 @@
               </a:rPr>
               <a:t>轮廓抽稀与曲线拟合</a:t>
             </a:r>
+            <a:endParaRPr sz="1500" b="0" dirty="0">
+              <a:solidFill>
+                <a:srgbClr val="405266"/>
+              </a:solidFill>
+              <a:latin typeface="PingFang SC"/>
+              <a:ea typeface="PingFang SC"/>
+              <a:cs typeface="PingFang SC"/>
+            </a:endParaRPr>
           </a:p>
           <a:p>
             <a:pPr algn="l">
@@ -6051,7 +6091,7 @@
               </a:defRPr>
             </a:pPr>
             <a:r>
-              <a:rPr sz="1500" b="0">
+              <a:rPr sz="1500" b="0" dirty="0" err="1">
                 <a:solidFill>
                   <a:srgbClr val="405266"/>
                 </a:solidFill>
@@ -6061,6 +6101,14 @@
               </a:rPr>
               <a:t>MEEF控制点优化</a:t>
             </a:r>
+            <a:endParaRPr sz="1500" b="0" dirty="0">
+              <a:solidFill>
+                <a:srgbClr val="405266"/>
+              </a:solidFill>
+              <a:latin typeface="PingFang SC"/>
+              <a:ea typeface="PingFang SC"/>
+              <a:cs typeface="PingFang SC"/>
+            </a:endParaRPr>
           </a:p>
           <a:p>
             <a:pPr algn="l">
@@ -6078,7 +6126,7 @@
               </a:defRPr>
             </a:pPr>
             <a:r>
-              <a:rPr sz="1500" b="0">
+              <a:rPr sz="1500" b="0" dirty="0" err="1">
                 <a:solidFill>
                   <a:srgbClr val="405266"/>
                 </a:solidFill>
@@ -6088,6 +6136,14 @@
               </a:rPr>
               <a:t>SRAF骨架线与宽度表达</a:t>
             </a:r>
+            <a:endParaRPr sz="1500" b="0" dirty="0">
+              <a:solidFill>
+                <a:srgbClr val="405266"/>
+              </a:solidFill>
+              <a:latin typeface="PingFang SC"/>
+              <a:ea typeface="PingFang SC"/>
+              <a:cs typeface="PingFang SC"/>
+            </a:endParaRPr>
           </a:p>
         </p:txBody>
       </p:sp>
@@ -6239,7 +6295,7 @@
               </a:defRPr>
             </a:pPr>
             <a:r>
-              <a:rPr sz="1500" b="0">
+              <a:rPr sz="1500" b="0" dirty="0" err="1">
                 <a:solidFill>
                   <a:srgbClr val="405266"/>
                 </a:solidFill>
@@ -6249,6 +6305,14 @@
               </a:rPr>
               <a:t>参数化批量仿真</a:t>
             </a:r>
+            <a:endParaRPr sz="1500" b="0" dirty="0">
+              <a:solidFill>
+                <a:srgbClr val="405266"/>
+              </a:solidFill>
+              <a:latin typeface="PingFang SC"/>
+              <a:ea typeface="PingFang SC"/>
+              <a:cs typeface="PingFang SC"/>
+            </a:endParaRPr>
           </a:p>
           <a:p>
             <a:pPr algn="l">
@@ -6266,7 +6330,7 @@
               </a:defRPr>
             </a:pPr>
             <a:r>
-              <a:rPr sz="1500" b="0">
+              <a:rPr sz="1500" b="0" dirty="0" err="1">
                 <a:solidFill>
                   <a:srgbClr val="405266"/>
                 </a:solidFill>
@@ -6276,6 +6340,14 @@
               </a:rPr>
               <a:t>正向与逆向预测</a:t>
             </a:r>
+            <a:endParaRPr sz="1500" b="0" dirty="0">
+              <a:solidFill>
+                <a:srgbClr val="405266"/>
+              </a:solidFill>
+              <a:latin typeface="PingFang SC"/>
+              <a:ea typeface="PingFang SC"/>
+              <a:cs typeface="PingFang SC"/>
+            </a:endParaRPr>
           </a:p>
           <a:p>
             <a:pPr algn="l">
@@ -6293,7 +6365,7 @@
               </a:defRPr>
             </a:pPr>
             <a:r>
-              <a:rPr sz="1500" b="0">
+              <a:rPr sz="1500" b="0" dirty="0" err="1">
                 <a:solidFill>
                   <a:srgbClr val="405266"/>
                 </a:solidFill>
@@ -6303,6 +6375,49 @@
               </a:rPr>
               <a:t>设计流程自动化</a:t>
             </a:r>
+            <a:endParaRPr lang="en-US" sz="1500" b="0" dirty="0">
+              <a:solidFill>
+                <a:srgbClr val="405266"/>
+              </a:solidFill>
+              <a:latin typeface="PingFang SC"/>
+              <a:ea typeface="PingFang SC"/>
+              <a:cs typeface="PingFang SC"/>
+            </a:endParaRPr>
+          </a:p>
+          <a:p>
+            <a:pPr algn="l">
+              <a:lnSpc>
+                <a:spcPct val="120000"/>
+              </a:lnSpc>
+              <a:buNone/>
+              <a:defRPr sz="1500" b="0">
+                <a:solidFill>
+                  <a:srgbClr val="405266"/>
+                </a:solidFill>
+                <a:latin typeface="PingFang SC"/>
+                <a:ea typeface="PingFang SC"/>
+                <a:cs typeface="PingFang SC"/>
+              </a:defRPr>
+            </a:pPr>
+            <a:r>
+              <a:rPr lang="zh-CN" altLang="en-US" sz="1500" dirty="0">
+                <a:solidFill>
+                  <a:srgbClr val="405266"/>
+                </a:solidFill>
+                <a:latin typeface="PingFang SC"/>
+                <a:ea typeface="PingFang SC"/>
+                <a:cs typeface="PingFang SC"/>
+              </a:rPr>
+              <a:t>深度学习数据收集与训练经验</a:t>
+            </a:r>
+            <a:endParaRPr sz="1500" b="0" dirty="0">
+              <a:solidFill>
+                <a:srgbClr val="405266"/>
+              </a:solidFill>
+              <a:latin typeface="PingFang SC"/>
+              <a:ea typeface="PingFang SC"/>
+              <a:cs typeface="PingFang SC"/>
+            </a:endParaRPr>
           </a:p>
         </p:txBody>
       </p:sp>
@@ -6702,8 +6817,8 @@
         </p:nvSpPr>
         <p:spPr>
           <a:xfrm>
-            <a:off x="428625" y="2744865"/>
-            <a:ext cx="4933950" cy="2000250"/>
+            <a:off x="428624" y="2744865"/>
+            <a:ext cx="5438775" cy="2000250"/>
           </a:xfrm>
           <a:prstGeom prst="rect">
             <a:avLst/>
@@ -6737,7 +6852,7 @@
               </a:defRPr>
             </a:pPr>
             <a:r>
-              <a:rPr sz="1575">
+              <a:rPr sz="1575" dirty="0" err="1">
                 <a:solidFill>
                   <a:srgbClr val="405266"/>
                 </a:solidFill>
@@ -6747,6 +6862,14 @@
               </a:rPr>
               <a:t>基于傅里叶光学构建光刻成像模型</a:t>
             </a:r>
+            <a:endParaRPr sz="1575" dirty="0">
+              <a:solidFill>
+                <a:srgbClr val="405266"/>
+              </a:solidFill>
+              <a:latin typeface="PingFang SC"/>
+              <a:ea typeface="PingFang SC"/>
+              <a:cs typeface="PingFang SC"/>
+            </a:endParaRPr>
           </a:p>
           <a:p>
             <a:pPr marL="215900" indent="-101600">
@@ -6767,7 +6890,7 @@
               </a:defRPr>
             </a:pPr>
             <a:r>
-              <a:rPr sz="1575">
+              <a:rPr sz="1575" dirty="0" err="1">
                 <a:solidFill>
                   <a:srgbClr val="405266"/>
                 </a:solidFill>
@@ -6777,6 +6900,14 @@
               </a:rPr>
               <a:t>以PE作为速度场驱动轮廓演化</a:t>
             </a:r>
+            <a:endParaRPr sz="1575" dirty="0">
+              <a:solidFill>
+                <a:srgbClr val="405266"/>
+              </a:solidFill>
+              <a:latin typeface="PingFang SC"/>
+              <a:ea typeface="PingFang SC"/>
+              <a:cs typeface="PingFang SC"/>
+            </a:endParaRPr>
           </a:p>
           <a:p>
             <a:pPr marL="215900" indent="-101600">
@@ -6797,7 +6928,7 @@
               </a:defRPr>
             </a:pPr>
             <a:r>
-              <a:rPr sz="1575">
+              <a:rPr sz="1575" dirty="0" err="1">
                 <a:solidFill>
                   <a:srgbClr val="405266"/>
                 </a:solidFill>
@@ -6807,6 +6938,14 @@
               </a:rPr>
               <a:t>采用WENO格式完成空间导数重构</a:t>
             </a:r>
+            <a:endParaRPr sz="1575" dirty="0">
+              <a:solidFill>
+                <a:srgbClr val="405266"/>
+              </a:solidFill>
+              <a:latin typeface="PingFang SC"/>
+              <a:ea typeface="PingFang SC"/>
+              <a:cs typeface="PingFang SC"/>
+            </a:endParaRPr>
           </a:p>
           <a:p>
             <a:pPr marL="215900" indent="-101600">
@@ -6827,7 +6966,7 @@
               </a:defRPr>
             </a:pPr>
             <a:r>
-              <a:rPr sz="1575">
+              <a:rPr lang="zh-CN" altLang="en-US" sz="1575" dirty="0">
                 <a:solidFill>
                   <a:srgbClr val="405266"/>
                 </a:solidFill>
@@ -6835,8 +6974,60 @@
                 <a:ea typeface="PingFang SC"/>
                 <a:cs typeface="PingFang SC"/>
               </a:rPr>
-              <a:t>完成Python与C++双平台实现</a:t>
-            </a:r>
+              <a:t>主要完成</a:t>
+            </a:r>
+            <a:r>
+              <a:rPr lang="en-US" altLang="zh-CN" sz="1575" dirty="0" err="1">
+                <a:solidFill>
+                  <a:srgbClr val="405266"/>
+                </a:solidFill>
+                <a:latin typeface="PingFang SC"/>
+                <a:ea typeface="PingFang SC"/>
+                <a:cs typeface="PingFang SC"/>
+              </a:rPr>
+              <a:t>c++</a:t>
+            </a:r>
+            <a:r>
+              <a:rPr lang="zh-CN" altLang="en-US" sz="1575" dirty="0">
+                <a:solidFill>
+                  <a:srgbClr val="405266"/>
+                </a:solidFill>
+                <a:latin typeface="PingFang SC"/>
+                <a:ea typeface="PingFang SC"/>
+                <a:cs typeface="PingFang SC"/>
+              </a:rPr>
+              <a:t>的成像模型与优化算法的构建</a:t>
+            </a:r>
+            <a:r>
+              <a:rPr lang="en-US" altLang="zh-CN" sz="1575" dirty="0">
+                <a:solidFill>
+                  <a:srgbClr val="405266"/>
+                </a:solidFill>
+                <a:latin typeface="PingFang SC"/>
+                <a:ea typeface="PingFang SC"/>
+                <a:cs typeface="PingFang SC"/>
+              </a:rPr>
+              <a:t>, </a:t>
+            </a:r>
+            <a:r>
+              <a:rPr lang="zh-CN" altLang="en-US" sz="1575" dirty="0">
+                <a:solidFill>
+                  <a:srgbClr val="405266"/>
+                </a:solidFill>
+                <a:latin typeface="PingFang SC"/>
+                <a:ea typeface="PingFang SC"/>
+                <a:cs typeface="PingFang SC"/>
+              </a:rPr>
+              <a:t>加速优化时间</a:t>
+            </a:r>
+            <a:endParaRPr sz="1575" dirty="0">
+              <a:solidFill>
+                <a:srgbClr val="405266"/>
+              </a:solidFill>
+              <a:latin typeface="PingFang SC"/>
+              <a:ea typeface="PingFang SC"/>
+              <a:cs typeface="PingFang SC"/>
+            </a:endParaRPr>
           </a:p>
         </p:txBody>
       </p:sp>
@@ -6855,7 +7046,7 @@
         </p:blipFill>
         <p:spPr>
           <a:xfrm>
-            <a:off x="5429250" y="1114425"/>
+            <a:off x="5564717" y="223638"/>
             <a:ext cx="6273800" cy="4200924"/>
           </a:xfrm>
           <a:prstGeom prst="rect">
@@ -6863,6 +7054,292 @@
           </a:prstGeom>
         </p:spPr>
       </p:pic>
+      <p:sp>
+        <p:nvSpPr>
+          <p:cNvPr id="2" name="文本框 1">
+            <a:extLst>
+              <a:ext uri="{FF2B5EF4-FFF2-40B4-BE49-F238E27FC236}">
+                <a16:creationId xmlns:a16="http://schemas.microsoft.com/office/drawing/2014/main" id="{6F603442-0BFE-99C6-32D9-C71E6C1BC8D8}"/>
+              </a:ext>
+            </a:extLst>
+          </p:cNvPr>
+          <p:cNvSpPr txBox="1"/>
+          <p:nvPr/>
+        </p:nvSpPr>
+        <p:spPr>
+          <a:xfrm>
+            <a:off x="968587" y="4946017"/>
+            <a:ext cx="4596130" cy="369332"/>
+          </a:xfrm>
+          <a:prstGeom prst="rect">
+            <a:avLst/>
+          </a:prstGeom>
+          <a:noFill/>
+        </p:spPr>
+        <p:txBody>
+          <a:bodyPr wrap="none" rtlCol="0">
+            <a:spAutoFit/>
+          </a:bodyPr>
+          <a:lstStyle/>
+          <a:p>
+            <a:r>
+              <a:rPr kumimoji="1" lang="en-US" altLang="zh-CN" dirty="0"/>
+              <a:t>CTM</a:t>
+            </a:r>
+            <a:r>
+              <a:rPr kumimoji="1" lang="zh-CN" altLang="en-US" dirty="0"/>
+              <a:t> 优化阶段</a:t>
+            </a:r>
+            <a:r>
+              <a:rPr kumimoji="1" lang="en-US" altLang="zh-CN" dirty="0"/>
+              <a:t>100</a:t>
+            </a:r>
+            <a:r>
+              <a:rPr kumimoji="1" lang="zh-CN" altLang="en-US" dirty="0"/>
+              <a:t>次迭代次数用时：</a:t>
+            </a:r>
+            <a:r>
+              <a:rPr kumimoji="1" lang="en-US" altLang="zh-CN" dirty="0"/>
+              <a:t>6.016s</a:t>
+            </a:r>
+            <a:endParaRPr kumimoji="1" lang="zh-CN" altLang="en-US" dirty="0"/>
+          </a:p>
+        </p:txBody>
+      </p:sp>
+      <p:sp>
+        <p:nvSpPr>
+          <p:cNvPr id="3" name="文本框 2">
+            <a:extLst>
+              <a:ext uri="{FF2B5EF4-FFF2-40B4-BE49-F238E27FC236}">
+                <a16:creationId xmlns:a16="http://schemas.microsoft.com/office/drawing/2014/main" id="{0A576F19-A239-C9BF-CF68-B811E34F228E}"/>
+              </a:ext>
+            </a:extLst>
+          </p:cNvPr>
+          <p:cNvSpPr txBox="1"/>
+          <p:nvPr/>
+        </p:nvSpPr>
+        <p:spPr>
+          <a:xfrm>
+            <a:off x="968587" y="5436350"/>
+            <a:ext cx="4573688" cy="369332"/>
+          </a:xfrm>
+          <a:prstGeom prst="rect">
+            <a:avLst/>
+          </a:prstGeom>
+          <a:noFill/>
+        </p:spPr>
+        <p:txBody>
+          <a:bodyPr wrap="none" rtlCol="0">
+            <a:spAutoFit/>
+          </a:bodyPr>
+          <a:lstStyle/>
+          <a:p>
+            <a:r>
+              <a:rPr kumimoji="1" lang="en-US" altLang="zh-CN" dirty="0"/>
+              <a:t>LSM</a:t>
+            </a:r>
+            <a:r>
+              <a:rPr kumimoji="1" lang="zh-CN" altLang="en-US" dirty="0"/>
+              <a:t> 优化阶段</a:t>
+            </a:r>
+            <a:r>
+              <a:rPr kumimoji="1" lang="en-US" altLang="zh-CN" dirty="0"/>
+              <a:t>200</a:t>
+            </a:r>
+            <a:r>
+              <a:rPr kumimoji="1" lang="zh-CN" altLang="en-US" dirty="0"/>
+              <a:t>次迭代次数用时：</a:t>
+            </a:r>
+            <a:r>
+              <a:rPr kumimoji="1" lang="en-US" altLang="zh-CN" dirty="0"/>
+              <a:t>11.69s</a:t>
+            </a:r>
+            <a:endParaRPr kumimoji="1" lang="zh-CN" altLang="en-US" dirty="0"/>
+          </a:p>
+        </p:txBody>
+      </p:sp>
+      <p:sp>
+        <p:nvSpPr>
+          <p:cNvPr id="4" name="文本框 3">
+            <a:extLst>
+              <a:ext uri="{FF2B5EF4-FFF2-40B4-BE49-F238E27FC236}">
+                <a16:creationId xmlns:a16="http://schemas.microsoft.com/office/drawing/2014/main" id="{947EA14A-AB58-4E07-0B5F-8DE7BFF67567}"/>
+              </a:ext>
+            </a:extLst>
+          </p:cNvPr>
+          <p:cNvSpPr txBox="1"/>
+          <p:nvPr/>
+        </p:nvSpPr>
+        <p:spPr>
+          <a:xfrm>
+            <a:off x="-86080" y="4964668"/>
+            <a:ext cx="1152880" cy="369332"/>
+          </a:xfrm>
+          <a:prstGeom prst="rect">
+            <a:avLst/>
+          </a:prstGeom>
+          <a:noFill/>
+        </p:spPr>
+        <p:txBody>
+          <a:bodyPr wrap="none" rtlCol="0">
+            <a:spAutoFit/>
+          </a:bodyPr>
+          <a:lstStyle/>
+          <a:p>
+            <a:r>
+              <a:rPr kumimoji="1" lang="en-US" altLang="zh-CN" dirty="0"/>
+              <a:t>C++ </a:t>
+            </a:r>
+            <a:r>
+              <a:rPr kumimoji="1" lang="zh-CN" altLang="en-US" dirty="0"/>
+              <a:t>版本</a:t>
+            </a:r>
+          </a:p>
+        </p:txBody>
+      </p:sp>
+      <p:sp>
+        <p:nvSpPr>
+          <p:cNvPr id="5" name="文本框 4">
+            <a:extLst>
+              <a:ext uri="{FF2B5EF4-FFF2-40B4-BE49-F238E27FC236}">
+                <a16:creationId xmlns:a16="http://schemas.microsoft.com/office/drawing/2014/main" id="{1BBBF9DA-5B90-86E7-F700-EAA5E80A8648}"/>
+              </a:ext>
+            </a:extLst>
+          </p:cNvPr>
+          <p:cNvSpPr txBox="1"/>
+          <p:nvPr/>
+        </p:nvSpPr>
+        <p:spPr>
+          <a:xfrm>
+            <a:off x="6973147" y="4958611"/>
+            <a:ext cx="4724370" cy="369332"/>
+          </a:xfrm>
+          <a:prstGeom prst="rect">
+            <a:avLst/>
+          </a:prstGeom>
+          <a:noFill/>
+        </p:spPr>
+        <p:txBody>
+          <a:bodyPr wrap="none" rtlCol="0">
+            <a:spAutoFit/>
+          </a:bodyPr>
+          <a:lstStyle/>
+          <a:p>
+            <a:r>
+              <a:rPr kumimoji="1" lang="en-US" altLang="zh-CN" dirty="0"/>
+              <a:t>CTM</a:t>
+            </a:r>
+            <a:r>
+              <a:rPr kumimoji="1" lang="zh-CN" altLang="en-US" dirty="0"/>
+              <a:t> 优化阶段</a:t>
+            </a:r>
+            <a:r>
+              <a:rPr kumimoji="1" lang="en-US" altLang="zh-CN" dirty="0"/>
+              <a:t>100</a:t>
+            </a:r>
+            <a:r>
+              <a:rPr kumimoji="1" lang="zh-CN" altLang="en-US" dirty="0"/>
+              <a:t>次迭代次数用时：</a:t>
+            </a:r>
+            <a:r>
+              <a:rPr kumimoji="1" lang="en-US" altLang="zh-CN" dirty="0"/>
+              <a:t>191.62s</a:t>
+            </a:r>
+            <a:endParaRPr kumimoji="1" lang="zh-CN" altLang="en-US" dirty="0"/>
+          </a:p>
+        </p:txBody>
+      </p:sp>
+      <p:sp>
+        <p:nvSpPr>
+          <p:cNvPr id="6" name="文本框 5">
+            <a:extLst>
+              <a:ext uri="{FF2B5EF4-FFF2-40B4-BE49-F238E27FC236}">
+                <a16:creationId xmlns:a16="http://schemas.microsoft.com/office/drawing/2014/main" id="{CA02D2BC-C2BF-CB34-0272-076D84CA5812}"/>
+              </a:ext>
+            </a:extLst>
+          </p:cNvPr>
+          <p:cNvSpPr txBox="1"/>
+          <p:nvPr/>
+        </p:nvSpPr>
+        <p:spPr>
+          <a:xfrm>
+            <a:off x="6984368" y="5436350"/>
+            <a:ext cx="4766048" cy="369332"/>
+          </a:xfrm>
+          <a:prstGeom prst="rect">
+            <a:avLst/>
+          </a:prstGeom>
+          <a:noFill/>
+        </p:spPr>
+        <p:txBody>
+          <a:bodyPr wrap="none" rtlCol="0">
+            <a:spAutoFit/>
+          </a:bodyPr>
+          <a:lstStyle/>
+          <a:p>
+            <a:r>
+              <a:rPr kumimoji="1" lang="en-US" altLang="zh-CN" dirty="0"/>
+              <a:t>LSM</a:t>
+            </a:r>
+            <a:r>
+              <a:rPr kumimoji="1" lang="zh-CN" altLang="en-US" dirty="0"/>
+              <a:t> 优化阶段</a:t>
+            </a:r>
+            <a:r>
+              <a:rPr kumimoji="1" lang="en-US" altLang="zh-CN" dirty="0"/>
+              <a:t>200</a:t>
+            </a:r>
+            <a:r>
+              <a:rPr kumimoji="1" lang="zh-CN" altLang="en-US" dirty="0"/>
+              <a:t>次迭代次数用时：</a:t>
+            </a:r>
+            <a:r>
+              <a:rPr kumimoji="1" lang="en-US" altLang="zh-CN" dirty="0"/>
+              <a:t> 754.82s</a:t>
+            </a:r>
+            <a:endParaRPr kumimoji="1" lang="zh-CN" altLang="en-US" dirty="0"/>
+          </a:p>
+        </p:txBody>
+      </p:sp>
+      <p:sp>
+        <p:nvSpPr>
+          <p:cNvPr id="7" name="文本框 6">
+            <a:extLst>
+              <a:ext uri="{FF2B5EF4-FFF2-40B4-BE49-F238E27FC236}">
+                <a16:creationId xmlns:a16="http://schemas.microsoft.com/office/drawing/2014/main" id="{BE0786BD-6CC7-C736-F71D-DB06C0FA78AD}"/>
+              </a:ext>
+            </a:extLst>
+          </p:cNvPr>
+          <p:cNvSpPr txBox="1"/>
+          <p:nvPr/>
+        </p:nvSpPr>
+        <p:spPr>
+          <a:xfrm>
+            <a:off x="5611876" y="4938574"/>
+            <a:ext cx="1372492" cy="369332"/>
+          </a:xfrm>
+          <a:prstGeom prst="rect">
+            <a:avLst/>
+          </a:prstGeom>
+          <a:noFill/>
+        </p:spPr>
+        <p:txBody>
+          <a:bodyPr wrap="none" rtlCol="0">
+            <a:spAutoFit/>
+          </a:bodyPr>
+          <a:lstStyle/>
+          <a:p>
+            <a:r>
+              <a:rPr kumimoji="1" lang="en-US" altLang="zh-CN" dirty="0"/>
+              <a:t>Python</a:t>
+            </a:r>
+            <a:r>
+              <a:rPr kumimoji="1" lang="zh-CN" altLang="en-US" dirty="0"/>
+              <a:t>版本</a:t>
+            </a:r>
+          </a:p>
+        </p:txBody>
+      </p:sp>
     </p:spTree>
     <p:extLst>
       <p:ext uri="{BB962C8B-B14F-4D97-AF65-F5344CB8AC3E}">
@@ -7463,7 +7940,7 @@
               </a:defRPr>
             </a:pPr>
             <a:r>
-              <a:rPr sz="1275" b="0">
+              <a:rPr sz="1275" b="0" dirty="0" err="1">
                 <a:solidFill>
                   <a:srgbClr val="405266"/>
                 </a:solidFill>
@@ -7471,8 +7948,16 @@
                 <a:ea typeface="PingFang SC"/>
                 <a:cs typeface="PingFang SC"/>
               </a:rPr>
-              <a:t>等距采样、DP简化、曲率采样</a:t>
-            </a:r>
+              <a:t>等距采样、DP简化</a:t>
+            </a:r>
+            <a:endParaRPr sz="1275" b="0" dirty="0">
+              <a:solidFill>
+                <a:srgbClr val="405266"/>
+              </a:solidFill>
+              <a:latin typeface="PingFang SC"/>
+              <a:ea typeface="PingFang SC"/>
+              <a:cs typeface="PingFang SC"/>
+            </a:endParaRPr>
           </a:p>
         </p:txBody>
       </p:sp>
